--- a/這裡有榮耀(崇拜版).pptx
+++ b/這裡有榮耀(崇拜版).pptx
@@ -169,10 +169,9 @@
           <a:lstStyle/>
           <a:p>
             <a:r>
-              <a:rPr lang="zh-TW" altLang="en-US" smtClean="0"/>
+              <a:rPr lang="zh-TW" altLang="en-US"/>
               <a:t>按一下以編輯母片標題樣式</a:t>
             </a:r>
-            <a:endParaRPr lang="zh-TW" altLang="en-US"/>
           </a:p>
         </p:txBody>
       </p:sp>
@@ -288,10 +287,9 @@
           </a:lstStyle>
           <a:p>
             <a:r>
-              <a:rPr lang="zh-TW" altLang="en-US" smtClean="0"/>
+              <a:rPr lang="zh-TW" altLang="en-US"/>
               <a:t>按一下以編輯母片副標題樣式</a:t>
             </a:r>
-            <a:endParaRPr lang="zh-TW" altLang="en-US"/>
           </a:p>
         </p:txBody>
       </p:sp>
@@ -313,7 +311,7 @@
             <a:fld id="{C4B8D84C-D8B6-449A-BCAD-2C522ABB8DE8}" type="datetimeFigureOut">
               <a:rPr lang="zh-TW" altLang="en-US" smtClean="0"/>
               <a:pPr/>
-              <a:t>2023/9/9</a:t>
+              <a:t>2024/4/20</a:t>
             </a:fld>
             <a:endParaRPr lang="zh-TW" altLang="en-US"/>
           </a:p>
@@ -403,10 +401,9 @@
           <a:lstStyle/>
           <a:p>
             <a:r>
-              <a:rPr lang="zh-TW" altLang="en-US" smtClean="0"/>
+              <a:rPr lang="zh-TW" altLang="en-US"/>
               <a:t>按一下以編輯母片標題樣式</a:t>
             </a:r>
-            <a:endParaRPr lang="zh-TW" altLang="en-US"/>
           </a:p>
         </p:txBody>
       </p:sp>
@@ -427,38 +424,37 @@
           <a:p>
             <a:pPr lvl="0"/>
             <a:r>
-              <a:rPr lang="zh-TW" altLang="en-US" smtClean="0"/>
+              <a:rPr lang="zh-TW" altLang="en-US"/>
               <a:t>按一下以編輯母片文字樣式</a:t>
             </a:r>
           </a:p>
           <a:p>
             <a:pPr lvl="1"/>
             <a:r>
-              <a:rPr lang="zh-TW" altLang="en-US" smtClean="0"/>
+              <a:rPr lang="zh-TW" altLang="en-US"/>
               <a:t>第二層</a:t>
             </a:r>
           </a:p>
           <a:p>
             <a:pPr lvl="2"/>
             <a:r>
-              <a:rPr lang="zh-TW" altLang="en-US" smtClean="0"/>
+              <a:rPr lang="zh-TW" altLang="en-US"/>
               <a:t>第三層</a:t>
             </a:r>
           </a:p>
           <a:p>
             <a:pPr lvl="3"/>
             <a:r>
-              <a:rPr lang="zh-TW" altLang="en-US" smtClean="0"/>
+              <a:rPr lang="zh-TW" altLang="en-US"/>
               <a:t>第四層</a:t>
             </a:r>
           </a:p>
           <a:p>
             <a:pPr lvl="4"/>
             <a:r>
-              <a:rPr lang="zh-TW" altLang="en-US" smtClean="0"/>
+              <a:rPr lang="zh-TW" altLang="en-US"/>
               <a:t>第五層</a:t>
             </a:r>
-            <a:endParaRPr lang="zh-TW" altLang="en-US"/>
           </a:p>
         </p:txBody>
       </p:sp>
@@ -480,7 +476,7 @@
             <a:fld id="{C4B8D84C-D8B6-449A-BCAD-2C522ABB8DE8}" type="datetimeFigureOut">
               <a:rPr lang="zh-TW" altLang="en-US" smtClean="0"/>
               <a:pPr/>
-              <a:t>2023/9/9</a:t>
+              <a:t>2024/4/20</a:t>
             </a:fld>
             <a:endParaRPr lang="zh-TW" altLang="en-US"/>
           </a:p>
@@ -575,10 +571,9 @@
           <a:lstStyle/>
           <a:p>
             <a:r>
-              <a:rPr lang="zh-TW" altLang="en-US" smtClean="0"/>
+              <a:rPr lang="zh-TW" altLang="en-US"/>
               <a:t>按一下以編輯母片標題樣式</a:t>
             </a:r>
-            <a:endParaRPr lang="zh-TW" altLang="en-US"/>
           </a:p>
         </p:txBody>
       </p:sp>
@@ -604,38 +599,37 @@
           <a:p>
             <a:pPr lvl="0"/>
             <a:r>
-              <a:rPr lang="zh-TW" altLang="en-US" smtClean="0"/>
+              <a:rPr lang="zh-TW" altLang="en-US"/>
               <a:t>按一下以編輯母片文字樣式</a:t>
             </a:r>
           </a:p>
           <a:p>
             <a:pPr lvl="1"/>
             <a:r>
-              <a:rPr lang="zh-TW" altLang="en-US" smtClean="0"/>
+              <a:rPr lang="zh-TW" altLang="en-US"/>
               <a:t>第二層</a:t>
             </a:r>
           </a:p>
           <a:p>
             <a:pPr lvl="2"/>
             <a:r>
-              <a:rPr lang="zh-TW" altLang="en-US" smtClean="0"/>
+              <a:rPr lang="zh-TW" altLang="en-US"/>
               <a:t>第三層</a:t>
             </a:r>
           </a:p>
           <a:p>
             <a:pPr lvl="3"/>
             <a:r>
-              <a:rPr lang="zh-TW" altLang="en-US" smtClean="0"/>
+              <a:rPr lang="zh-TW" altLang="en-US"/>
               <a:t>第四層</a:t>
             </a:r>
           </a:p>
           <a:p>
             <a:pPr lvl="4"/>
             <a:r>
-              <a:rPr lang="zh-TW" altLang="en-US" smtClean="0"/>
+              <a:rPr lang="zh-TW" altLang="en-US"/>
               <a:t>第五層</a:t>
             </a:r>
-            <a:endParaRPr lang="zh-TW" altLang="en-US"/>
           </a:p>
         </p:txBody>
       </p:sp>
@@ -657,7 +651,7 @@
             <a:fld id="{C4B8D84C-D8B6-449A-BCAD-2C522ABB8DE8}" type="datetimeFigureOut">
               <a:rPr lang="zh-TW" altLang="en-US" smtClean="0"/>
               <a:pPr/>
-              <a:t>2023/9/9</a:t>
+              <a:t>2024/4/20</a:t>
             </a:fld>
             <a:endParaRPr lang="zh-TW" altLang="en-US"/>
           </a:p>
@@ -747,10 +741,9 @@
           <a:lstStyle/>
           <a:p>
             <a:r>
-              <a:rPr lang="zh-TW" altLang="en-US" smtClean="0"/>
+              <a:rPr lang="zh-TW" altLang="en-US"/>
               <a:t>按一下以編輯母片標題樣式</a:t>
             </a:r>
-            <a:endParaRPr lang="zh-TW" altLang="en-US"/>
           </a:p>
         </p:txBody>
       </p:sp>
@@ -771,38 +764,37 @@
           <a:p>
             <a:pPr lvl="0"/>
             <a:r>
-              <a:rPr lang="zh-TW" altLang="en-US" smtClean="0"/>
+              <a:rPr lang="zh-TW" altLang="en-US"/>
               <a:t>按一下以編輯母片文字樣式</a:t>
             </a:r>
           </a:p>
           <a:p>
             <a:pPr lvl="1"/>
             <a:r>
-              <a:rPr lang="zh-TW" altLang="en-US" smtClean="0"/>
+              <a:rPr lang="zh-TW" altLang="en-US"/>
               <a:t>第二層</a:t>
             </a:r>
           </a:p>
           <a:p>
             <a:pPr lvl="2"/>
             <a:r>
-              <a:rPr lang="zh-TW" altLang="en-US" smtClean="0"/>
+              <a:rPr lang="zh-TW" altLang="en-US"/>
               <a:t>第三層</a:t>
             </a:r>
           </a:p>
           <a:p>
             <a:pPr lvl="3"/>
             <a:r>
-              <a:rPr lang="zh-TW" altLang="en-US" smtClean="0"/>
+              <a:rPr lang="zh-TW" altLang="en-US"/>
               <a:t>第四層</a:t>
             </a:r>
           </a:p>
           <a:p>
             <a:pPr lvl="4"/>
             <a:r>
-              <a:rPr lang="zh-TW" altLang="en-US" smtClean="0"/>
+              <a:rPr lang="zh-TW" altLang="en-US"/>
               <a:t>第五層</a:t>
             </a:r>
-            <a:endParaRPr lang="zh-TW" altLang="en-US"/>
           </a:p>
         </p:txBody>
       </p:sp>
@@ -824,7 +816,7 @@
             <a:fld id="{C4B8D84C-D8B6-449A-BCAD-2C522ABB8DE8}" type="datetimeFigureOut">
               <a:rPr lang="zh-TW" altLang="en-US" smtClean="0"/>
               <a:pPr/>
-              <a:t>2023/9/9</a:t>
+              <a:t>2024/4/20</a:t>
             </a:fld>
             <a:endParaRPr lang="zh-TW" altLang="en-US"/>
           </a:p>
@@ -923,10 +915,9 @@
           </a:lstStyle>
           <a:p>
             <a:r>
-              <a:rPr lang="zh-TW" altLang="en-US" smtClean="0"/>
+              <a:rPr lang="zh-TW" altLang="en-US"/>
               <a:t>按一下以編輯母片標題樣式</a:t>
             </a:r>
-            <a:endParaRPr lang="zh-TW" altLang="en-US"/>
           </a:p>
         </p:txBody>
       </p:sp>
@@ -1043,7 +1034,7 @@
           <a:p>
             <a:pPr lvl="0"/>
             <a:r>
-              <a:rPr lang="zh-TW" altLang="en-US" smtClean="0"/>
+              <a:rPr lang="zh-TW" altLang="en-US"/>
               <a:t>按一下以編輯母片文字樣式</a:t>
             </a:r>
           </a:p>
@@ -1067,7 +1058,7 @@
             <a:fld id="{C4B8D84C-D8B6-449A-BCAD-2C522ABB8DE8}" type="datetimeFigureOut">
               <a:rPr lang="zh-TW" altLang="en-US" smtClean="0"/>
               <a:pPr/>
-              <a:t>2023/9/9</a:t>
+              <a:t>2024/4/20</a:t>
             </a:fld>
             <a:endParaRPr lang="zh-TW" altLang="en-US"/>
           </a:p>
@@ -1157,10 +1148,9 @@
           <a:lstStyle/>
           <a:p>
             <a:r>
-              <a:rPr lang="zh-TW" altLang="en-US" smtClean="0"/>
+              <a:rPr lang="zh-TW" altLang="en-US"/>
               <a:t>按一下以編輯母片標題樣式</a:t>
             </a:r>
-            <a:endParaRPr lang="zh-TW" altLang="en-US"/>
           </a:p>
         </p:txBody>
       </p:sp>
@@ -1214,38 +1204,37 @@
           <a:p>
             <a:pPr lvl="0"/>
             <a:r>
-              <a:rPr lang="zh-TW" altLang="en-US" smtClean="0"/>
+              <a:rPr lang="zh-TW" altLang="en-US"/>
               <a:t>按一下以編輯母片文字樣式</a:t>
             </a:r>
           </a:p>
           <a:p>
             <a:pPr lvl="1"/>
             <a:r>
-              <a:rPr lang="zh-TW" altLang="en-US" smtClean="0"/>
+              <a:rPr lang="zh-TW" altLang="en-US"/>
               <a:t>第二層</a:t>
             </a:r>
           </a:p>
           <a:p>
             <a:pPr lvl="2"/>
             <a:r>
-              <a:rPr lang="zh-TW" altLang="en-US" smtClean="0"/>
+              <a:rPr lang="zh-TW" altLang="en-US"/>
               <a:t>第三層</a:t>
             </a:r>
           </a:p>
           <a:p>
             <a:pPr lvl="3"/>
             <a:r>
-              <a:rPr lang="zh-TW" altLang="en-US" smtClean="0"/>
+              <a:rPr lang="zh-TW" altLang="en-US"/>
               <a:t>第四層</a:t>
             </a:r>
           </a:p>
           <a:p>
             <a:pPr lvl="4"/>
             <a:r>
-              <a:rPr lang="zh-TW" altLang="en-US" smtClean="0"/>
+              <a:rPr lang="zh-TW" altLang="en-US"/>
               <a:t>第五層</a:t>
             </a:r>
-            <a:endParaRPr lang="zh-TW" altLang="en-US"/>
           </a:p>
         </p:txBody>
       </p:sp>
@@ -1299,38 +1288,37 @@
           <a:p>
             <a:pPr lvl="0"/>
             <a:r>
-              <a:rPr lang="zh-TW" altLang="en-US" smtClean="0"/>
+              <a:rPr lang="zh-TW" altLang="en-US"/>
               <a:t>按一下以編輯母片文字樣式</a:t>
             </a:r>
           </a:p>
           <a:p>
             <a:pPr lvl="1"/>
             <a:r>
-              <a:rPr lang="zh-TW" altLang="en-US" smtClean="0"/>
+              <a:rPr lang="zh-TW" altLang="en-US"/>
               <a:t>第二層</a:t>
             </a:r>
           </a:p>
           <a:p>
             <a:pPr lvl="2"/>
             <a:r>
-              <a:rPr lang="zh-TW" altLang="en-US" smtClean="0"/>
+              <a:rPr lang="zh-TW" altLang="en-US"/>
               <a:t>第三層</a:t>
             </a:r>
           </a:p>
           <a:p>
             <a:pPr lvl="3"/>
             <a:r>
-              <a:rPr lang="zh-TW" altLang="en-US" smtClean="0"/>
+              <a:rPr lang="zh-TW" altLang="en-US"/>
               <a:t>第四層</a:t>
             </a:r>
           </a:p>
           <a:p>
             <a:pPr lvl="4"/>
             <a:r>
-              <a:rPr lang="zh-TW" altLang="en-US" smtClean="0"/>
+              <a:rPr lang="zh-TW" altLang="en-US"/>
               <a:t>第五層</a:t>
             </a:r>
-            <a:endParaRPr lang="zh-TW" altLang="en-US"/>
           </a:p>
         </p:txBody>
       </p:sp>
@@ -1352,7 +1340,7 @@
             <a:fld id="{C4B8D84C-D8B6-449A-BCAD-2C522ABB8DE8}" type="datetimeFigureOut">
               <a:rPr lang="zh-TW" altLang="en-US" smtClean="0"/>
               <a:pPr/>
-              <a:t>2023/9/9</a:t>
+              <a:t>2024/4/20</a:t>
             </a:fld>
             <a:endParaRPr lang="zh-TW" altLang="en-US"/>
           </a:p>
@@ -1446,10 +1434,9 @@
           </a:lstStyle>
           <a:p>
             <a:r>
-              <a:rPr lang="zh-TW" altLang="en-US" smtClean="0"/>
+              <a:rPr lang="zh-TW" altLang="en-US"/>
               <a:t>按一下以編輯母片標題樣式</a:t>
             </a:r>
-            <a:endParaRPr lang="zh-TW" altLang="en-US"/>
           </a:p>
         </p:txBody>
       </p:sp>
@@ -1512,7 +1499,7 @@
           <a:p>
             <a:pPr lvl="0"/>
             <a:r>
-              <a:rPr lang="zh-TW" altLang="en-US" smtClean="0"/>
+              <a:rPr lang="zh-TW" altLang="en-US"/>
               <a:t>按一下以編輯母片文字樣式</a:t>
             </a:r>
           </a:p>
@@ -1568,38 +1555,37 @@
           <a:p>
             <a:pPr lvl="0"/>
             <a:r>
-              <a:rPr lang="zh-TW" altLang="en-US" smtClean="0"/>
+              <a:rPr lang="zh-TW" altLang="en-US"/>
               <a:t>按一下以編輯母片文字樣式</a:t>
             </a:r>
           </a:p>
           <a:p>
             <a:pPr lvl="1"/>
             <a:r>
-              <a:rPr lang="zh-TW" altLang="en-US" smtClean="0"/>
+              <a:rPr lang="zh-TW" altLang="en-US"/>
               <a:t>第二層</a:t>
             </a:r>
           </a:p>
           <a:p>
             <a:pPr lvl="2"/>
             <a:r>
-              <a:rPr lang="zh-TW" altLang="en-US" smtClean="0"/>
+              <a:rPr lang="zh-TW" altLang="en-US"/>
               <a:t>第三層</a:t>
             </a:r>
           </a:p>
           <a:p>
             <a:pPr lvl="3"/>
             <a:r>
-              <a:rPr lang="zh-TW" altLang="en-US" smtClean="0"/>
+              <a:rPr lang="zh-TW" altLang="en-US"/>
               <a:t>第四層</a:t>
             </a:r>
           </a:p>
           <a:p>
             <a:pPr lvl="4"/>
             <a:r>
-              <a:rPr lang="zh-TW" altLang="en-US" smtClean="0"/>
+              <a:rPr lang="zh-TW" altLang="en-US"/>
               <a:t>第五層</a:t>
             </a:r>
-            <a:endParaRPr lang="zh-TW" altLang="en-US"/>
           </a:p>
         </p:txBody>
       </p:sp>
@@ -1662,7 +1648,7 @@
           <a:p>
             <a:pPr lvl="0"/>
             <a:r>
-              <a:rPr lang="zh-TW" altLang="en-US" smtClean="0"/>
+              <a:rPr lang="zh-TW" altLang="en-US"/>
               <a:t>按一下以編輯母片文字樣式</a:t>
             </a:r>
           </a:p>
@@ -1718,38 +1704,37 @@
           <a:p>
             <a:pPr lvl="0"/>
             <a:r>
-              <a:rPr lang="zh-TW" altLang="en-US" smtClean="0"/>
+              <a:rPr lang="zh-TW" altLang="en-US"/>
               <a:t>按一下以編輯母片文字樣式</a:t>
             </a:r>
           </a:p>
           <a:p>
             <a:pPr lvl="1"/>
             <a:r>
-              <a:rPr lang="zh-TW" altLang="en-US" smtClean="0"/>
+              <a:rPr lang="zh-TW" altLang="en-US"/>
               <a:t>第二層</a:t>
             </a:r>
           </a:p>
           <a:p>
             <a:pPr lvl="2"/>
             <a:r>
-              <a:rPr lang="zh-TW" altLang="en-US" smtClean="0"/>
+              <a:rPr lang="zh-TW" altLang="en-US"/>
               <a:t>第三層</a:t>
             </a:r>
           </a:p>
           <a:p>
             <a:pPr lvl="3"/>
             <a:r>
-              <a:rPr lang="zh-TW" altLang="en-US" smtClean="0"/>
+              <a:rPr lang="zh-TW" altLang="en-US"/>
               <a:t>第四層</a:t>
             </a:r>
           </a:p>
           <a:p>
             <a:pPr lvl="4"/>
             <a:r>
-              <a:rPr lang="zh-TW" altLang="en-US" smtClean="0"/>
+              <a:rPr lang="zh-TW" altLang="en-US"/>
               <a:t>第五層</a:t>
             </a:r>
-            <a:endParaRPr lang="zh-TW" altLang="en-US"/>
           </a:p>
         </p:txBody>
       </p:sp>
@@ -1771,7 +1756,7 @@
             <a:fld id="{C4B8D84C-D8B6-449A-BCAD-2C522ABB8DE8}" type="datetimeFigureOut">
               <a:rPr lang="zh-TW" altLang="en-US" smtClean="0"/>
               <a:pPr/>
-              <a:t>2023/9/9</a:t>
+              <a:t>2024/4/20</a:t>
             </a:fld>
             <a:endParaRPr lang="zh-TW" altLang="en-US"/>
           </a:p>
@@ -1861,10 +1846,9 @@
           <a:lstStyle/>
           <a:p>
             <a:r>
-              <a:rPr lang="zh-TW" altLang="en-US" smtClean="0"/>
+              <a:rPr lang="zh-TW" altLang="en-US"/>
               <a:t>按一下以編輯母片標題樣式</a:t>
             </a:r>
-            <a:endParaRPr lang="zh-TW" altLang="en-US"/>
           </a:p>
         </p:txBody>
       </p:sp>
@@ -1886,7 +1870,7 @@
             <a:fld id="{C4B8D84C-D8B6-449A-BCAD-2C522ABB8DE8}" type="datetimeFigureOut">
               <a:rPr lang="zh-TW" altLang="en-US" smtClean="0"/>
               <a:pPr/>
-              <a:t>2023/9/9</a:t>
+              <a:t>2024/4/20</a:t>
             </a:fld>
             <a:endParaRPr lang="zh-TW" altLang="en-US"/>
           </a:p>
@@ -1978,7 +1962,7 @@
             <a:fld id="{C4B8D84C-D8B6-449A-BCAD-2C522ABB8DE8}" type="datetimeFigureOut">
               <a:rPr lang="zh-TW" altLang="en-US" smtClean="0"/>
               <a:pPr/>
-              <a:t>2023/9/9</a:t>
+              <a:t>2024/4/20</a:t>
             </a:fld>
             <a:endParaRPr lang="zh-TW" altLang="en-US"/>
           </a:p>
@@ -2077,10 +2061,9 @@
           </a:lstStyle>
           <a:p>
             <a:r>
-              <a:rPr lang="zh-TW" altLang="en-US" smtClean="0"/>
+              <a:rPr lang="zh-TW" altLang="en-US"/>
               <a:t>按一下以編輯母片標題樣式</a:t>
             </a:r>
-            <a:endParaRPr lang="zh-TW" altLang="en-US"/>
           </a:p>
         </p:txBody>
       </p:sp>
@@ -2134,38 +2117,37 @@
           <a:p>
             <a:pPr lvl="0"/>
             <a:r>
-              <a:rPr lang="zh-TW" altLang="en-US" smtClean="0"/>
+              <a:rPr lang="zh-TW" altLang="en-US"/>
               <a:t>按一下以編輯母片文字樣式</a:t>
             </a:r>
           </a:p>
           <a:p>
             <a:pPr lvl="1"/>
             <a:r>
-              <a:rPr lang="zh-TW" altLang="en-US" smtClean="0"/>
+              <a:rPr lang="zh-TW" altLang="en-US"/>
               <a:t>第二層</a:t>
             </a:r>
           </a:p>
           <a:p>
             <a:pPr lvl="2"/>
             <a:r>
-              <a:rPr lang="zh-TW" altLang="en-US" smtClean="0"/>
+              <a:rPr lang="zh-TW" altLang="en-US"/>
               <a:t>第三層</a:t>
             </a:r>
           </a:p>
           <a:p>
             <a:pPr lvl="3"/>
             <a:r>
-              <a:rPr lang="zh-TW" altLang="en-US" smtClean="0"/>
+              <a:rPr lang="zh-TW" altLang="en-US"/>
               <a:t>第四層</a:t>
             </a:r>
           </a:p>
           <a:p>
             <a:pPr lvl="4"/>
             <a:r>
-              <a:rPr lang="zh-TW" altLang="en-US" smtClean="0"/>
+              <a:rPr lang="zh-TW" altLang="en-US"/>
               <a:t>第五層</a:t>
             </a:r>
-            <a:endParaRPr lang="zh-TW" altLang="en-US"/>
           </a:p>
         </p:txBody>
       </p:sp>
@@ -2228,7 +2210,7 @@
           <a:p>
             <a:pPr lvl="0"/>
             <a:r>
-              <a:rPr lang="zh-TW" altLang="en-US" smtClean="0"/>
+              <a:rPr lang="zh-TW" altLang="en-US"/>
               <a:t>按一下以編輯母片文字樣式</a:t>
             </a:r>
           </a:p>
@@ -2252,7 +2234,7 @@
             <a:fld id="{C4B8D84C-D8B6-449A-BCAD-2C522ABB8DE8}" type="datetimeFigureOut">
               <a:rPr lang="zh-TW" altLang="en-US" smtClean="0"/>
               <a:pPr/>
-              <a:t>2023/9/9</a:t>
+              <a:t>2024/4/20</a:t>
             </a:fld>
             <a:endParaRPr lang="zh-TW" altLang="en-US"/>
           </a:p>
@@ -2351,10 +2333,9 @@
           </a:lstStyle>
           <a:p>
             <a:r>
-              <a:rPr lang="zh-TW" altLang="en-US" smtClean="0"/>
+              <a:rPr lang="zh-TW" altLang="en-US"/>
               <a:t>按一下以編輯母片標題樣式</a:t>
             </a:r>
-            <a:endParaRPr lang="zh-TW" altLang="en-US"/>
           </a:p>
         </p:txBody>
       </p:sp>
@@ -2416,10 +2397,9 @@
           </a:lstStyle>
           <a:p>
             <a:r>
-              <a:rPr lang="zh-TW" altLang="en-US" smtClean="0"/>
+              <a:rPr lang="zh-TW" altLang="en-US"/>
               <a:t>按一下圖示以新增圖片</a:t>
             </a:r>
-            <a:endParaRPr lang="zh-TW" altLang="en-US"/>
           </a:p>
         </p:txBody>
       </p:sp>
@@ -2482,7 +2462,7 @@
           <a:p>
             <a:pPr lvl="0"/>
             <a:r>
-              <a:rPr lang="zh-TW" altLang="en-US" smtClean="0"/>
+              <a:rPr lang="zh-TW" altLang="en-US"/>
               <a:t>按一下以編輯母片文字樣式</a:t>
             </a:r>
           </a:p>
@@ -2506,7 +2486,7 @@
             <a:fld id="{C4B8D84C-D8B6-449A-BCAD-2C522ABB8DE8}" type="datetimeFigureOut">
               <a:rPr lang="zh-TW" altLang="en-US" smtClean="0"/>
               <a:pPr/>
-              <a:t>2023/9/9</a:t>
+              <a:t>2024/4/20</a:t>
             </a:fld>
             <a:endParaRPr lang="zh-TW" altLang="en-US"/>
           </a:p>
@@ -2616,10 +2596,9 @@
           <a:lstStyle/>
           <a:p>
             <a:r>
-              <a:rPr lang="zh-TW" altLang="en-US" smtClean="0"/>
+              <a:rPr lang="zh-TW" altLang="en-US"/>
               <a:t>按一下以編輯母片標題樣式</a:t>
             </a:r>
-            <a:endParaRPr lang="zh-TW" altLang="en-US"/>
           </a:p>
         </p:txBody>
       </p:sp>
@@ -2650,38 +2629,37 @@
           <a:p>
             <a:pPr lvl="0"/>
             <a:r>
-              <a:rPr lang="zh-TW" altLang="en-US" smtClean="0"/>
+              <a:rPr lang="zh-TW" altLang="en-US"/>
               <a:t>按一下以編輯母片文字樣式</a:t>
             </a:r>
           </a:p>
           <a:p>
             <a:pPr lvl="1"/>
             <a:r>
-              <a:rPr lang="zh-TW" altLang="en-US" smtClean="0"/>
+              <a:rPr lang="zh-TW" altLang="en-US"/>
               <a:t>第二層</a:t>
             </a:r>
           </a:p>
           <a:p>
             <a:pPr lvl="2"/>
             <a:r>
-              <a:rPr lang="zh-TW" altLang="en-US" smtClean="0"/>
+              <a:rPr lang="zh-TW" altLang="en-US"/>
               <a:t>第三層</a:t>
             </a:r>
           </a:p>
           <a:p>
             <a:pPr lvl="3"/>
             <a:r>
-              <a:rPr lang="zh-TW" altLang="en-US" smtClean="0"/>
+              <a:rPr lang="zh-TW" altLang="en-US"/>
               <a:t>第四層</a:t>
             </a:r>
           </a:p>
           <a:p>
             <a:pPr lvl="4"/>
             <a:r>
-              <a:rPr lang="zh-TW" altLang="en-US" smtClean="0"/>
+              <a:rPr lang="zh-TW" altLang="en-US"/>
               <a:t>第五層</a:t>
             </a:r>
-            <a:endParaRPr lang="zh-TW" altLang="en-US"/>
           </a:p>
         </p:txBody>
       </p:sp>
@@ -2721,7 +2699,7 @@
             <a:fld id="{C4B8D84C-D8B6-449A-BCAD-2C522ABB8DE8}" type="datetimeFigureOut">
               <a:rPr lang="zh-TW" altLang="en-US" smtClean="0"/>
               <a:pPr/>
-              <a:t>2023/9/9</a:t>
+              <a:t>2024/4/20</a:t>
             </a:fld>
             <a:endParaRPr lang="zh-TW" altLang="en-US"/>
           </a:p>
@@ -3115,7 +3093,7 @@
           <a:lstStyle/>
           <a:p>
             <a:r>
-              <a:rPr lang="zh-TW" altLang="en-US" sz="5400" b="1" i="1" dirty="0" smtClean="0">
+              <a:rPr lang="zh-TW" altLang="en-US" sz="5400" b="1" i="1" dirty="0">
                 <a:solidFill>
                   <a:srgbClr val="660033"/>
                 </a:solidFill>
@@ -3129,24 +3107,7 @@
                 <a:latin typeface="微軟正黑體" pitchFamily="34" charset="-120"/>
                 <a:ea typeface="微軟正黑體" pitchFamily="34" charset="-120"/>
               </a:rPr>
-              <a:t>這</a:t>
-            </a:r>
-            <a:r>
-              <a:rPr lang="zh-TW" altLang="en-US" sz="5400" b="1" i="1" dirty="0">
-                <a:solidFill>
-                  <a:srgbClr val="660033"/>
-                </a:solidFill>
-                <a:effectLst>
-                  <a:outerShdw blurRad="38100" dist="38100" dir="2700000" algn="tl">
-                    <a:srgbClr val="000000">
-                      <a:alpha val="43137"/>
-                    </a:srgbClr>
-                  </a:outerShdw>
-                </a:effectLst>
-                <a:latin typeface="微軟正黑體" pitchFamily="34" charset="-120"/>
-                <a:ea typeface="微軟正黑體" pitchFamily="34" charset="-120"/>
-              </a:rPr>
-              <a:t>裡有榮耀</a:t>
+              <a:t>這裡有榮耀</a:t>
             </a:r>
           </a:p>
         </p:txBody>
@@ -3260,7 +3221,7 @@
         <p:spPr>
           <a:xfrm>
             <a:off x="0" y="3867894"/>
-            <a:ext cx="9144000" cy="461665"/>
+            <a:ext cx="9144000" cy="523220"/>
           </a:xfrm>
           <a:prstGeom prst="rect">
             <a:avLst/>
@@ -3275,7 +3236,7 @@
           <a:p>
             <a:pPr algn="ctr"/>
             <a:r>
-              <a:rPr lang="en-US" sz="2400" b="1" dirty="0" smtClean="0">
+              <a:rPr lang="en-US" sz="2800" b="1" dirty="0">
                 <a:solidFill>
                   <a:srgbClr val="660033"/>
                 </a:solidFill>
@@ -3285,17 +3246,17 @@
               <a:t>( </a:t>
             </a:r>
             <a:r>
-              <a:rPr lang="zh-CN" altLang="en-US" sz="2400" b="1" dirty="0" smtClean="0">
+              <a:rPr lang="zh-CN" altLang="en-US" sz="2800" b="1" dirty="0">
                 <a:solidFill>
                   <a:srgbClr val="660033"/>
                 </a:solidFill>
                 <a:latin typeface="Microsoft JhengHei" panose="020B0604030504040204" pitchFamily="34" charset="-120"/>
                 <a:ea typeface="Microsoft JhengHei" panose="020B0604030504040204" pitchFamily="34" charset="-120"/>
               </a:rPr>
-              <a:t>正</a:t>
-            </a:r>
-            <a:r>
-              <a:rPr lang="en-US" sz="2400" b="1" dirty="0" smtClean="0">
+              <a:t>正歌</a:t>
+            </a:r>
+            <a:r>
+              <a:rPr lang="en-US" sz="2800" b="1" dirty="0">
                 <a:solidFill>
                   <a:srgbClr val="660033"/>
                 </a:solidFill>
@@ -3304,7 +3265,7 @@
               </a:rPr>
               <a:t> )</a:t>
             </a:r>
-            <a:endParaRPr lang="vi-VN" sz="2400" b="1" dirty="0">
+            <a:endParaRPr lang="vi-VN" sz="2800" b="1" dirty="0">
               <a:solidFill>
                 <a:srgbClr val="660033"/>
               </a:solidFill>
@@ -3403,13 +3364,6 @@
               </a:rPr>
               <a:t>這裡有醫治湧流</a:t>
             </a:r>
-            <a:endParaRPr lang="zh-TW" altLang="en-US" sz="4800" b="1" dirty="0">
-              <a:solidFill>
-                <a:srgbClr val="660033"/>
-              </a:solidFill>
-              <a:latin typeface="微軟正黑體" pitchFamily="34" charset="-120"/>
-              <a:ea typeface="微軟正黑體" pitchFamily="34" charset="-120"/>
-            </a:endParaRPr>
           </a:p>
         </p:txBody>
       </p:sp>
@@ -3422,7 +3376,7 @@
         <p:spPr>
           <a:xfrm>
             <a:off x="0" y="3867894"/>
-            <a:ext cx="9144000" cy="461665"/>
+            <a:ext cx="9144000" cy="523220"/>
           </a:xfrm>
           <a:prstGeom prst="rect">
             <a:avLst/>
@@ -3437,7 +3391,7 @@
           <a:p>
             <a:pPr algn="ctr"/>
             <a:r>
-              <a:rPr lang="en-US" sz="2400" b="1" dirty="0" smtClean="0">
+              <a:rPr lang="en-US" sz="2800" b="1" dirty="0">
                 <a:solidFill>
                   <a:srgbClr val="660033"/>
                 </a:solidFill>
@@ -3447,17 +3401,17 @@
               <a:t>( </a:t>
             </a:r>
             <a:r>
-              <a:rPr lang="zh-CN" altLang="en-US" sz="2400" b="1" dirty="0" smtClean="0">
+              <a:rPr lang="zh-CN" altLang="en-US" sz="2800" b="1" dirty="0">
                 <a:solidFill>
                   <a:srgbClr val="660033"/>
                 </a:solidFill>
                 <a:latin typeface="Microsoft JhengHei" panose="020B0604030504040204" pitchFamily="34" charset="-120"/>
                 <a:ea typeface="Microsoft JhengHei" panose="020B0604030504040204" pitchFamily="34" charset="-120"/>
               </a:rPr>
-              <a:t>正</a:t>
-            </a:r>
-            <a:r>
-              <a:rPr lang="en-US" sz="2400" b="1" dirty="0" smtClean="0">
+              <a:t>正歌</a:t>
+            </a:r>
+            <a:r>
+              <a:rPr lang="en-US" sz="2800" b="1" dirty="0">
                 <a:solidFill>
                   <a:srgbClr val="660033"/>
                 </a:solidFill>
@@ -3466,7 +3420,7 @@
               </a:rPr>
               <a:t> )</a:t>
             </a:r>
-            <a:endParaRPr lang="vi-VN" sz="2400" b="1" dirty="0">
+            <a:endParaRPr lang="vi-VN" sz="2800" b="1" dirty="0">
               <a:solidFill>
                 <a:srgbClr val="660033"/>
               </a:solidFill>
@@ -3581,7 +3535,7 @@
         <p:spPr>
           <a:xfrm>
             <a:off x="0" y="3867894"/>
-            <a:ext cx="9144000" cy="461665"/>
+            <a:ext cx="9144000" cy="523220"/>
           </a:xfrm>
           <a:prstGeom prst="rect">
             <a:avLst/>
@@ -3596,7 +3550,7 @@
           <a:p>
             <a:pPr algn="ctr"/>
             <a:r>
-              <a:rPr lang="en-US" sz="2400" b="1" dirty="0" smtClean="0">
+              <a:rPr lang="en-US" sz="2800" b="1" dirty="0">
                 <a:solidFill>
                   <a:srgbClr val="660033"/>
                 </a:solidFill>
@@ -3606,17 +3560,17 @@
               <a:t>( </a:t>
             </a:r>
             <a:r>
-              <a:rPr lang="zh-CN" altLang="en-US" sz="2400" b="1" dirty="0" smtClean="0">
+              <a:rPr lang="zh-CN" altLang="en-US" sz="2800" b="1" dirty="0">
                 <a:solidFill>
                   <a:srgbClr val="660033"/>
                 </a:solidFill>
                 <a:latin typeface="Microsoft JhengHei" panose="020B0604030504040204" pitchFamily="34" charset="-120"/>
                 <a:ea typeface="Microsoft JhengHei" panose="020B0604030504040204" pitchFamily="34" charset="-120"/>
               </a:rPr>
-              <a:t>正</a:t>
-            </a:r>
-            <a:r>
-              <a:rPr lang="en-US" sz="2400" b="1" dirty="0" smtClean="0">
+              <a:t>正歌</a:t>
+            </a:r>
+            <a:r>
+              <a:rPr lang="en-US" sz="2800" b="1" dirty="0">
                 <a:solidFill>
                   <a:srgbClr val="660033"/>
                 </a:solidFill>
@@ -3625,7 +3579,7 @@
               </a:rPr>
               <a:t> )</a:t>
             </a:r>
-            <a:endParaRPr lang="vi-VN" sz="2400" b="1" dirty="0">
+            <a:endParaRPr lang="vi-VN" sz="2800" b="1" dirty="0">
               <a:solidFill>
                 <a:srgbClr val="660033"/>
               </a:solidFill>
@@ -3719,47 +3673,7 @@
                 <a:latin typeface="微軟正黑體" pitchFamily="34" charset="-120"/>
                 <a:ea typeface="微軟正黑體" pitchFamily="34" charset="-120"/>
               </a:rPr>
-              <a:t>永活的</a:t>
-            </a:r>
-            <a:r>
-              <a:rPr lang="zh-TW" altLang="en-US" sz="4800" b="1" dirty="0">
-                <a:solidFill>
-                  <a:srgbClr val="660033"/>
-                </a:solidFill>
-                <a:latin typeface="微軟正黑體" pitchFamily="34" charset="-120"/>
-                <a:ea typeface="微軟正黑體" pitchFamily="34" charset="-120"/>
-              </a:rPr>
-              <a:t>主</a:t>
-            </a:r>
-            <a:r>
-              <a:rPr lang="zh-TW" altLang="en-US" sz="4800" b="1" dirty="0">
-                <a:solidFill>
-                  <a:srgbClr val="660033"/>
-                </a:solidFill>
-                <a:latin typeface="微軟正黑體" pitchFamily="34" charset="-120"/>
-                <a:ea typeface="微軟正黑體" pitchFamily="34" charset="-120"/>
-              </a:rPr>
-              <a:t>祢</a:t>
-            </a:r>
-            <a:r>
-              <a:rPr lang="zh-TW" altLang="en-US" sz="4800" b="1" dirty="0">
-                <a:solidFill>
-                  <a:srgbClr val="660033"/>
-                </a:solidFill>
-                <a:latin typeface="微軟正黑體" pitchFamily="34" charset="-120"/>
-                <a:ea typeface="微軟正黑體" pitchFamily="34" charset="-120"/>
-              </a:rPr>
-              <a:t>在</a:t>
-            </a:r>
-            <a:r>
-              <a:rPr lang="zh-TW" altLang="en-US" sz="4800" b="1" dirty="0">
-                <a:solidFill>
-                  <a:srgbClr val="660033"/>
-                </a:solidFill>
-                <a:latin typeface="微軟正黑體" pitchFamily="34" charset="-120"/>
-                <a:ea typeface="微軟正黑體" pitchFamily="34" charset="-120"/>
-              </a:rPr>
-              <a:t>這裡</a:t>
+              <a:t>永活的主祢在這裡</a:t>
             </a:r>
           </a:p>
         </p:txBody>
@@ -3773,7 +3687,7 @@
         <p:spPr>
           <a:xfrm>
             <a:off x="0" y="3867894"/>
-            <a:ext cx="9144000" cy="461665"/>
+            <a:ext cx="9144000" cy="523220"/>
           </a:xfrm>
           <a:prstGeom prst="rect">
             <a:avLst/>
@@ -3788,7 +3702,7 @@
           <a:p>
             <a:pPr algn="ctr"/>
             <a:r>
-              <a:rPr lang="en-US" sz="2400" b="1" dirty="0" smtClean="0">
+              <a:rPr lang="en-US" sz="2800" b="1" dirty="0">
                 <a:solidFill>
                   <a:srgbClr val="660033"/>
                 </a:solidFill>
@@ -3798,17 +3712,17 @@
               <a:t>( </a:t>
             </a:r>
             <a:r>
-              <a:rPr lang="zh-CN" altLang="en-US" sz="2400" b="1" dirty="0" smtClean="0">
+              <a:rPr lang="zh-CN" altLang="en-US" sz="2800" b="1" dirty="0">
                 <a:solidFill>
                   <a:srgbClr val="660033"/>
                 </a:solidFill>
                 <a:latin typeface="Microsoft JhengHei" panose="020B0604030504040204" pitchFamily="34" charset="-120"/>
                 <a:ea typeface="Microsoft JhengHei" panose="020B0604030504040204" pitchFamily="34" charset="-120"/>
               </a:rPr>
-              <a:t>正</a:t>
-            </a:r>
-            <a:r>
-              <a:rPr lang="en-US" sz="2400" b="1" dirty="0" smtClean="0">
+              <a:t>正歌</a:t>
+            </a:r>
+            <a:r>
+              <a:rPr lang="en-US" sz="2800" b="1" dirty="0">
                 <a:solidFill>
                   <a:srgbClr val="660033"/>
                 </a:solidFill>
@@ -3817,7 +3731,7 @@
               </a:rPr>
               <a:t> )</a:t>
             </a:r>
-            <a:endParaRPr lang="vi-VN" sz="2400" b="1" dirty="0">
+            <a:endParaRPr lang="vi-VN" sz="2800" b="1" dirty="0">
               <a:solidFill>
                 <a:srgbClr val="660033"/>
               </a:solidFill>
@@ -3889,27 +3803,7 @@
                 <a:latin typeface="微軟正黑體" pitchFamily="34" charset="-120"/>
                 <a:ea typeface="微軟正黑體" pitchFamily="34" charset="-120"/>
               </a:rPr>
-              <a:t>祢</a:t>
-            </a:r>
-            <a:r>
-              <a:rPr lang="zh-TW" altLang="en-US" sz="4800" b="1" dirty="0" smtClean="0">
-                <a:solidFill>
-                  <a:srgbClr val="660033"/>
-                </a:solidFill>
-                <a:latin typeface="微軟正黑體" pitchFamily="34" charset="-120"/>
-                <a:ea typeface="微軟正黑體" pitchFamily="34" charset="-120"/>
-              </a:rPr>
-              <a:t>是</a:t>
-            </a:r>
-            <a:r>
-              <a:rPr lang="zh-TW" altLang="en-US" sz="4800" b="1" dirty="0">
-                <a:solidFill>
-                  <a:srgbClr val="660033"/>
-                </a:solidFill>
-                <a:latin typeface="微軟正黑體" pitchFamily="34" charset="-120"/>
-                <a:ea typeface="微軟正黑體" pitchFamily="34" charset="-120"/>
-              </a:rPr>
-              <a:t>起初的   末後的</a:t>
+              <a:t>祢是起初的   末後的</a:t>
             </a:r>
             <a:endParaRPr lang="en-US" altLang="zh-TW" sz="4800" b="1" dirty="0">
               <a:solidFill>
@@ -3952,7 +3846,7 @@
         <p:spPr>
           <a:xfrm>
             <a:off x="0" y="3867894"/>
-            <a:ext cx="9144000" cy="461665"/>
+            <a:ext cx="9144000" cy="523220"/>
           </a:xfrm>
           <a:prstGeom prst="rect">
             <a:avLst/>
@@ -3967,7 +3861,7 @@
           <a:p>
             <a:pPr algn="ctr"/>
             <a:r>
-              <a:rPr lang="en-US" sz="2400" b="1" dirty="0" smtClean="0">
+              <a:rPr lang="en-US" sz="2800" b="1" dirty="0">
                 <a:solidFill>
                   <a:srgbClr val="660033"/>
                 </a:solidFill>
@@ -3977,36 +3871,26 @@
               <a:t>( </a:t>
             </a:r>
             <a:r>
-              <a:rPr lang="zh-CN" altLang="en-US" sz="2400" b="1" dirty="0" smtClean="0">
+              <a:rPr lang="zh-CN" altLang="en-US" sz="2800" b="1" dirty="0">
                 <a:solidFill>
                   <a:srgbClr val="660033"/>
                 </a:solidFill>
                 <a:latin typeface="Microsoft JhengHei" panose="020B0604030504040204" pitchFamily="34" charset="-120"/>
                 <a:ea typeface="Microsoft JhengHei" panose="020B0604030504040204" pitchFamily="34" charset="-120"/>
               </a:rPr>
-              <a:t>副</a:t>
-            </a:r>
-            <a:r>
-              <a:rPr lang="en-US" sz="2400" b="1" dirty="0" smtClean="0">
+              <a:t>副歌</a:t>
+            </a:r>
+            <a:r>
+              <a:rPr lang="en-US" sz="2800" b="1" dirty="0">
                 <a:solidFill>
                   <a:srgbClr val="660033"/>
                 </a:solidFill>
                 <a:latin typeface="Microsoft JhengHei" panose="020B0604030504040204" pitchFamily="34" charset="-120"/>
                 <a:ea typeface="Microsoft JhengHei" panose="020B0604030504040204" pitchFamily="34" charset="-120"/>
               </a:rPr>
-              <a:t> </a:t>
-            </a:r>
-            <a:r>
-              <a:rPr lang="en-US" sz="2400" b="1" dirty="0" smtClean="0">
-                <a:solidFill>
-                  <a:srgbClr val="660033"/>
-                </a:solidFill>
-                <a:latin typeface="Microsoft JhengHei" panose="020B0604030504040204" pitchFamily="34" charset="-120"/>
-                <a:ea typeface="Microsoft JhengHei" panose="020B0604030504040204" pitchFamily="34" charset="-120"/>
-              </a:rPr>
-              <a:t>)</a:t>
-            </a:r>
-            <a:endParaRPr lang="vi-VN" sz="2400" b="1" dirty="0">
+              <a:t> )</a:t>
+            </a:r>
+            <a:endParaRPr lang="vi-VN" sz="2800" b="1" dirty="0">
               <a:solidFill>
                 <a:srgbClr val="660033"/>
               </a:solidFill>
@@ -4078,27 +3962,7 @@
                 <a:latin typeface="微軟正黑體" pitchFamily="34" charset="-120"/>
                 <a:ea typeface="微軟正黑體" pitchFamily="34" charset="-120"/>
               </a:rPr>
-              <a:t>全心敬</a:t>
-            </a:r>
-            <a:r>
-              <a:rPr lang="zh-TW" altLang="en-US" sz="4800" b="1" dirty="0" smtClean="0">
-                <a:solidFill>
-                  <a:srgbClr val="660033"/>
-                </a:solidFill>
-                <a:latin typeface="微軟正黑體" pitchFamily="34" charset="-120"/>
-                <a:ea typeface="微軟正黑體" pitchFamily="34" charset="-120"/>
-              </a:rPr>
-              <a:t>拜祢  大</a:t>
-            </a:r>
-            <a:r>
-              <a:rPr lang="zh-TW" altLang="en-US" sz="4800" b="1" dirty="0">
-                <a:solidFill>
-                  <a:srgbClr val="660033"/>
-                </a:solidFill>
-                <a:latin typeface="微軟正黑體" pitchFamily="34" charset="-120"/>
-                <a:ea typeface="微軟正黑體" pitchFamily="34" charset="-120"/>
-              </a:rPr>
-              <a:t>聲歡呼</a:t>
+              <a:t>全心敬拜祢  大聲歡呼</a:t>
             </a:r>
             <a:endParaRPr lang="en-US" altLang="zh-TW" sz="4800" b="1" dirty="0">
               <a:solidFill>
@@ -4122,13 +3986,6 @@
               </a:rPr>
               <a:t>羔羊被高舉</a:t>
             </a:r>
-            <a:endParaRPr lang="zh-TW" altLang="en-US" sz="4800" b="1" dirty="0">
-              <a:solidFill>
-                <a:srgbClr val="660033"/>
-              </a:solidFill>
-              <a:latin typeface="微軟正黑體" pitchFamily="34" charset="-120"/>
-              <a:ea typeface="微軟正黑體" pitchFamily="34" charset="-120"/>
-            </a:endParaRPr>
           </a:p>
         </p:txBody>
       </p:sp>
@@ -4141,7 +3998,7 @@
         <p:spPr>
           <a:xfrm>
             <a:off x="0" y="3867894"/>
-            <a:ext cx="9144000" cy="461665"/>
+            <a:ext cx="9144000" cy="523220"/>
           </a:xfrm>
           <a:prstGeom prst="rect">
             <a:avLst/>
@@ -4156,7 +4013,7 @@
           <a:p>
             <a:pPr algn="ctr"/>
             <a:r>
-              <a:rPr lang="en-US" sz="2400" b="1" dirty="0" smtClean="0">
+              <a:rPr lang="en-US" sz="2800" b="1" dirty="0">
                 <a:solidFill>
                   <a:srgbClr val="660033"/>
                 </a:solidFill>
@@ -4166,36 +4023,26 @@
               <a:t>( </a:t>
             </a:r>
             <a:r>
-              <a:rPr lang="zh-CN" altLang="en-US" sz="2400" b="1" dirty="0" smtClean="0">
+              <a:rPr lang="zh-CN" altLang="en-US" sz="2800" b="1" dirty="0">
                 <a:solidFill>
                   <a:srgbClr val="660033"/>
                 </a:solidFill>
                 <a:latin typeface="Microsoft JhengHei" panose="020B0604030504040204" pitchFamily="34" charset="-120"/>
                 <a:ea typeface="Microsoft JhengHei" panose="020B0604030504040204" pitchFamily="34" charset="-120"/>
               </a:rPr>
-              <a:t>副</a:t>
-            </a:r>
-            <a:r>
-              <a:rPr lang="en-US" sz="2400" b="1" dirty="0" smtClean="0">
+              <a:t>副歌</a:t>
+            </a:r>
+            <a:r>
+              <a:rPr lang="en-US" sz="2800" b="1" dirty="0">
                 <a:solidFill>
                   <a:srgbClr val="660033"/>
                 </a:solidFill>
                 <a:latin typeface="Microsoft JhengHei" panose="020B0604030504040204" pitchFamily="34" charset="-120"/>
                 <a:ea typeface="Microsoft JhengHei" panose="020B0604030504040204" pitchFamily="34" charset="-120"/>
               </a:rPr>
-              <a:t> </a:t>
-            </a:r>
-            <a:r>
-              <a:rPr lang="en-US" sz="2400" b="1" dirty="0" smtClean="0">
-                <a:solidFill>
-                  <a:srgbClr val="660033"/>
-                </a:solidFill>
-                <a:latin typeface="Microsoft JhengHei" panose="020B0604030504040204" pitchFamily="34" charset="-120"/>
-                <a:ea typeface="Microsoft JhengHei" panose="020B0604030504040204" pitchFamily="34" charset="-120"/>
-              </a:rPr>
-              <a:t>)</a:t>
-            </a:r>
-            <a:endParaRPr lang="vi-VN" sz="2400" b="1" dirty="0">
+              <a:t> )</a:t>
+            </a:r>
+            <a:endParaRPr lang="vi-VN" sz="2800" b="1" dirty="0">
               <a:solidFill>
                 <a:srgbClr val="660033"/>
               </a:solidFill>
@@ -4289,47 +4136,7 @@
                 <a:latin typeface="微軟正黑體" pitchFamily="34" charset="-120"/>
                 <a:ea typeface="微軟正黑體" pitchFamily="34" charset="-120"/>
               </a:rPr>
-              <a:t>萬國讚</a:t>
-            </a:r>
-            <a:r>
-              <a:rPr lang="zh-TW" altLang="en-US" sz="4800" b="1" dirty="0" smtClean="0">
-                <a:solidFill>
-                  <a:srgbClr val="660033"/>
-                </a:solidFill>
-                <a:latin typeface="微軟正黑體" pitchFamily="34" charset="-120"/>
-                <a:ea typeface="微軟正黑體" pitchFamily="34" charset="-120"/>
-              </a:rPr>
-              <a:t>嘆</a:t>
-            </a:r>
-            <a:r>
-              <a:rPr lang="zh-TW" altLang="en-US" sz="4800" b="1" dirty="0">
-                <a:solidFill>
-                  <a:srgbClr val="660033"/>
-                </a:solidFill>
-                <a:latin typeface="微軟正黑體" pitchFamily="34" charset="-120"/>
-                <a:ea typeface="微軟正黑體" pitchFamily="34" charset="-120"/>
-              </a:rPr>
-              <a:t>祢</a:t>
-            </a:r>
-            <a:r>
-              <a:rPr lang="zh-TW" altLang="en-US" sz="4800" b="1" dirty="0" smtClean="0">
-                <a:solidFill>
-                  <a:srgbClr val="660033"/>
-                </a:solidFill>
-                <a:latin typeface="微軟正黑體" pitchFamily="34" charset="-120"/>
-                <a:ea typeface="微軟正黑體" pitchFamily="34" charset="-120"/>
-              </a:rPr>
-              <a:t>的</a:t>
-            </a:r>
-            <a:r>
-              <a:rPr lang="zh-TW" altLang="en-US" sz="4800" b="1" dirty="0">
-                <a:solidFill>
-                  <a:srgbClr val="660033"/>
-                </a:solidFill>
-                <a:latin typeface="微軟正黑體" pitchFamily="34" charset="-120"/>
-                <a:ea typeface="微軟正黑體" pitchFamily="34" charset="-120"/>
-              </a:rPr>
-              <a:t>榮美</a:t>
+              <a:t>萬國讚嘆祢的榮美</a:t>
             </a:r>
             <a:endParaRPr lang="en-US" altLang="zh-TW" sz="4800" b="1" dirty="0">
               <a:solidFill>
@@ -4350,7 +4157,7 @@
         <p:spPr>
           <a:xfrm>
             <a:off x="0" y="3867894"/>
-            <a:ext cx="9144000" cy="461665"/>
+            <a:ext cx="9144000" cy="523220"/>
           </a:xfrm>
           <a:prstGeom prst="rect">
             <a:avLst/>
@@ -4365,7 +4172,7 @@
           <a:p>
             <a:pPr algn="ctr"/>
             <a:r>
-              <a:rPr lang="en-US" sz="2400" b="1" dirty="0" smtClean="0">
+              <a:rPr lang="en-US" sz="2800" b="1" dirty="0">
                 <a:solidFill>
                   <a:srgbClr val="660033"/>
                 </a:solidFill>
@@ -4375,36 +4182,26 @@
               <a:t>( </a:t>
             </a:r>
             <a:r>
-              <a:rPr lang="zh-CN" altLang="en-US" sz="2400" b="1" dirty="0" smtClean="0">
+              <a:rPr lang="zh-CN" altLang="en-US" sz="2800" b="1" dirty="0">
                 <a:solidFill>
                   <a:srgbClr val="660033"/>
                 </a:solidFill>
                 <a:latin typeface="Microsoft JhengHei" panose="020B0604030504040204" pitchFamily="34" charset="-120"/>
                 <a:ea typeface="Microsoft JhengHei" panose="020B0604030504040204" pitchFamily="34" charset="-120"/>
               </a:rPr>
-              <a:t>副</a:t>
-            </a:r>
-            <a:r>
-              <a:rPr lang="en-US" sz="2400" b="1" dirty="0" smtClean="0">
+              <a:t>副歌</a:t>
+            </a:r>
+            <a:r>
+              <a:rPr lang="en-US" sz="2800" b="1" dirty="0">
                 <a:solidFill>
                   <a:srgbClr val="660033"/>
                 </a:solidFill>
                 <a:latin typeface="Microsoft JhengHei" panose="020B0604030504040204" pitchFamily="34" charset="-120"/>
                 <a:ea typeface="Microsoft JhengHei" panose="020B0604030504040204" pitchFamily="34" charset="-120"/>
               </a:rPr>
-              <a:t> </a:t>
-            </a:r>
-            <a:r>
-              <a:rPr lang="en-US" sz="2400" b="1" dirty="0" smtClean="0">
-                <a:solidFill>
-                  <a:srgbClr val="660033"/>
-                </a:solidFill>
-                <a:latin typeface="Microsoft JhengHei" panose="020B0604030504040204" pitchFamily="34" charset="-120"/>
-                <a:ea typeface="Microsoft JhengHei" panose="020B0604030504040204" pitchFamily="34" charset="-120"/>
-              </a:rPr>
-              <a:t>)</a:t>
-            </a:r>
-            <a:endParaRPr lang="vi-VN" sz="2400" b="1" dirty="0">
+              <a:t> )</a:t>
+            </a:r>
+            <a:endParaRPr lang="vi-VN" sz="2800" b="1" dirty="0">
               <a:solidFill>
                 <a:srgbClr val="660033"/>
               </a:solidFill>
@@ -4500,13 +4297,6 @@
               </a:rPr>
               <a:t>昔在   今在   永在的君王</a:t>
             </a:r>
-            <a:endParaRPr lang="zh-TW" altLang="en-US" sz="4800" b="1" dirty="0">
-              <a:solidFill>
-                <a:srgbClr val="660033"/>
-              </a:solidFill>
-              <a:latin typeface="微軟正黑體" pitchFamily="34" charset="-120"/>
-              <a:ea typeface="微軟正黑體" pitchFamily="34" charset="-120"/>
-            </a:endParaRPr>
           </a:p>
         </p:txBody>
       </p:sp>
@@ -4519,7 +4309,7 @@
         <p:spPr>
           <a:xfrm>
             <a:off x="0" y="3867894"/>
-            <a:ext cx="9144000" cy="461665"/>
+            <a:ext cx="9144000" cy="523220"/>
           </a:xfrm>
           <a:prstGeom prst="rect">
             <a:avLst/>
@@ -4534,7 +4324,7 @@
           <a:p>
             <a:pPr algn="ctr"/>
             <a:r>
-              <a:rPr lang="en-US" sz="2400" b="1" dirty="0" smtClean="0">
+              <a:rPr lang="en-US" sz="2800" b="1" dirty="0">
                 <a:solidFill>
                   <a:srgbClr val="660033"/>
                 </a:solidFill>
@@ -4544,36 +4334,26 @@
               <a:t>( </a:t>
             </a:r>
             <a:r>
-              <a:rPr lang="zh-CN" altLang="en-US" sz="2400" b="1" dirty="0" smtClean="0">
+              <a:rPr lang="zh-CN" altLang="en-US" sz="2800" b="1" dirty="0">
                 <a:solidFill>
                   <a:srgbClr val="660033"/>
                 </a:solidFill>
                 <a:latin typeface="Microsoft JhengHei" panose="020B0604030504040204" pitchFamily="34" charset="-120"/>
                 <a:ea typeface="Microsoft JhengHei" panose="020B0604030504040204" pitchFamily="34" charset="-120"/>
               </a:rPr>
-              <a:t>副</a:t>
-            </a:r>
-            <a:r>
-              <a:rPr lang="en-US" sz="2400" b="1" dirty="0" smtClean="0">
+              <a:t>副歌</a:t>
+            </a:r>
+            <a:r>
+              <a:rPr lang="en-US" sz="2800" b="1" dirty="0">
                 <a:solidFill>
                   <a:srgbClr val="660033"/>
                 </a:solidFill>
                 <a:latin typeface="Microsoft JhengHei" panose="020B0604030504040204" pitchFamily="34" charset="-120"/>
                 <a:ea typeface="Microsoft JhengHei" panose="020B0604030504040204" pitchFamily="34" charset="-120"/>
               </a:rPr>
-              <a:t> </a:t>
-            </a:r>
-            <a:r>
-              <a:rPr lang="en-US" sz="2400" b="1" dirty="0" smtClean="0">
-                <a:solidFill>
-                  <a:srgbClr val="660033"/>
-                </a:solidFill>
-                <a:latin typeface="Microsoft JhengHei" panose="020B0604030504040204" pitchFamily="34" charset="-120"/>
-                <a:ea typeface="Microsoft JhengHei" panose="020B0604030504040204" pitchFamily="34" charset="-120"/>
-              </a:rPr>
-              <a:t>)</a:t>
-            </a:r>
-            <a:endParaRPr lang="vi-VN" sz="2400" b="1" dirty="0">
+              <a:t> )</a:t>
+            </a:r>
+            <a:endParaRPr lang="vi-VN" sz="2800" b="1" dirty="0">
               <a:solidFill>
                 <a:srgbClr val="660033"/>
               </a:solidFill>
